--- a/outputs/ophthalmology-batch-20261011/octa/A4_bw_editable.pptx
+++ b/outputs/ophthalmology-batch-20261011/octa/A4_bw_editable.pptx
@@ -535,7 +535,7 @@
           <a:p/>
           <a:p>
             <a:r>
-              <a:t>octa-04 OCTA采集：PLEX Elite 9000扫频OCTA；黄斑中心6×6-mm扫描。具体质量排除细则见补充材料，当前上传文件未附补充全文。</a:t>
+              <a:t>octa-04 OCTA采集：PLEX Elite 9000扫频OCTA；黄斑中心6 mm × 6 mm扫描。具体质量排除细则见补充材料，当前上传文件未附补充全文。</a:t>
             </a:r>
           </a:p>
           <a:p>
@@ -679,7 +679,7 @@
           <a:p/>
           <a:p>
             <a:r>
-              <a:t>octa-10 AUC不能作诊断阈值：论文未设计或充分赋能来建立临床可操作阈值；没有用于个体诊断的GCC/CCFD/VSD切点、预测时限或用药方案。</a:t>
+              <a:t>octa-10 AUC不能作诊断阈值：研究设计及统计效能不足以建立临床可操作阈值；没有用于个体诊断的GCC/CCFD/VSD切点、预测时限或用药方案。</a:t>
             </a:r>
           </a:p>
           <a:p>
@@ -4210,7 +4210,7 @@
       </p:sp>
       <p:sp>
         <p:nvSpPr>
-          <p:cNvPr id="11" name="SS-OCTA黄斑中心6×6-mm扫描；PLEX Elite 9000。认知诊断参照ADRC/NIA"/>
+          <p:cNvPr id="11" name="SS-OCTA黄斑中心6 mm × 6 mm扫描；PLEX Elite 9000。认知诊断参照ADR"/>
           <p:cNvSpPr txBox="1"/>
           <p:nvPr/>
         </p:nvSpPr>
@@ -4250,7 +4250,7 @@
                 <a:ea typeface="Microsoft YaHei"/>
                 <a:cs typeface="Microsoft YaHei"/>
               </a:rPr>
-              <a:t>SS-OCTA黄斑中心6×6-mm扫描；PLEX Elite 9000。认知诊</a:t>
+              <a:t>SS-OCTA黄斑中心6 mm × 6 mm扫描；PLEX Elite 9000。</a:t>
             </a:r>
           </a:p>
           <a:p>
@@ -4274,7 +4274,7 @@
                 <a:ea typeface="Microsoft YaHei"/>
                 <a:cs typeface="Microsoft YaHei"/>
               </a:rPr>
-              <a:t>断参照ADRC/NIA-AA，非单凭影像。</a:t>
+              <a:t>认知诊断参照ADRC/NIA-AA，非单凭影像。</a:t>
             </a:r>
           </a:p>
         </p:txBody>
@@ -5260,7 +5260,7 @@
       </p:sp>
       <p:sp>
         <p:nvSpPr>
-          <p:cNvPr id="31" name="SS-OCTA黄斑中心6×6-mm扫描；PLEX Elite 9000。认知诊断参照ADRC/NIA"/>
+          <p:cNvPr id="31" name="SS-OCTA黄斑中心6 mm × 6 mm扫描；PLEX Elite 9000。认知诊断参照ADR"/>
           <p:cNvSpPr txBox="1"/>
           <p:nvPr/>
         </p:nvSpPr>
@@ -5300,7 +5300,7 @@
                 <a:ea typeface="Microsoft YaHei"/>
                 <a:cs typeface="Microsoft YaHei"/>
               </a:rPr>
-              <a:t>SS-OCTA黄斑中心6×6-mm扫描；PLEX Elite 9000。认知诊</a:t>
+              <a:t>SS-OCTA黄斑中心6 mm × 6 mm扫描；PLEX Elite 9000。</a:t>
             </a:r>
           </a:p>
           <a:p>
@@ -5324,7 +5324,7 @@
                 <a:ea typeface="Microsoft YaHei"/>
                 <a:cs typeface="Microsoft YaHei"/>
               </a:rPr>
-              <a:t>断参照ADRC/NIA-AA，非单凭影像。</a:t>
+              <a:t>认知诊断参照ADRC/NIA-AA，非单凭影像。</a:t>
             </a:r>
           </a:p>
         </p:txBody>
@@ -6310,7 +6310,7 @@
       </p:sp>
       <p:sp>
         <p:nvSpPr>
-          <p:cNvPr id="51" name="SS-OCTA黄斑中心6×6-mm扫描；PLEX Elite 9000。认知诊断参照ADRC/NIA"/>
+          <p:cNvPr id="51" name="SS-OCTA黄斑中心6 mm × 6 mm扫描；PLEX Elite 9000。认知诊断参照ADR"/>
           <p:cNvSpPr txBox="1"/>
           <p:nvPr/>
         </p:nvSpPr>
@@ -6350,7 +6350,7 @@
                 <a:ea typeface="Microsoft YaHei"/>
                 <a:cs typeface="Microsoft YaHei"/>
               </a:rPr>
-              <a:t>SS-OCTA黄斑中心6×6-mm扫描；PLEX Elite 9000。认知诊</a:t>
+              <a:t>SS-OCTA黄斑中心6 mm × 6 mm扫描；PLEX Elite 9000。</a:t>
             </a:r>
           </a:p>
           <a:p>
@@ -6374,7 +6374,7 @@
                 <a:ea typeface="Microsoft YaHei"/>
                 <a:cs typeface="Microsoft YaHei"/>
               </a:rPr>
-              <a:t>断参照ADRC/NIA-AA，非单凭影像。</a:t>
+              <a:t>认知诊断参照ADRC/NIA-AA，非单凭影像。</a:t>
             </a:r>
           </a:p>
         </p:txBody>
@@ -7360,7 +7360,7 @@
       </p:sp>
       <p:sp>
         <p:nvSpPr>
-          <p:cNvPr id="71" name="SS-OCTA黄斑中心6×6-mm扫描；PLEX Elite 9000。认知诊断参照ADRC/NIA"/>
+          <p:cNvPr id="71" name="SS-OCTA黄斑中心6 mm × 6 mm扫描；PLEX Elite 9000。认知诊断参照ADR"/>
           <p:cNvSpPr txBox="1"/>
           <p:nvPr/>
         </p:nvSpPr>
@@ -7400,7 +7400,7 @@
                 <a:ea typeface="Microsoft YaHei"/>
                 <a:cs typeface="Microsoft YaHei"/>
               </a:rPr>
-              <a:t>SS-OCTA黄斑中心6×6-mm扫描；PLEX Elite 9000。认知诊</a:t>
+              <a:t>SS-OCTA黄斑中心6 mm × 6 mm扫描；PLEX Elite 9000。</a:t>
             </a:r>
           </a:p>
           <a:p>
@@ -7424,7 +7424,7 @@
                 <a:ea typeface="Microsoft YaHei"/>
                 <a:cs typeface="Microsoft YaHei"/>
               </a:rPr>
-              <a:t>断参照ADRC/NIA-AA，非单凭影像。</a:t>
+              <a:t>认知诊断参照ADRC/NIA-AA，非单凭影像。</a:t>
             </a:r>
           </a:p>
         </p:txBody>
